--- a/metro/metro-f07-agent-intro.pptx
+++ b/metro/metro-f07-agent-intro.pptx
@@ -3514,9 +3514,9 @@
                 <a:solidFill>
                   <a:srgbClr val="14161A"/>
                 </a:solidFill>
-                <a:latin typeface="Space Grotesk"/>
-                <a:ea typeface="Space Grotesk"/>
-                <a:cs typeface="Space Grotesk"/>
+                <a:latin typeface="HK Grotesk"/>
+                <a:ea typeface="HK Grotesk"/>
+                <a:cs typeface="HK Grotesk"/>
               </a:rPr>
               <a:t>NO</a:t>
             </a:r>
@@ -3553,9 +3553,9 @@
                 <a:solidFill>
                   <a:srgbClr val="14161A"/>
                 </a:solidFill>
-                <a:latin typeface="Space Grotesk"/>
-                <a:ea typeface="Space Grotesk"/>
-                <a:cs typeface="Space Grotesk"/>
+                <a:latin typeface="HK Grotesk"/>
+                <a:ea typeface="HK Grotesk"/>
+                <a:cs typeface="HK Grotesk"/>
               </a:rPr>
               <a:t>North &amp; Oak</a:t>
             </a:r>
@@ -3697,9 +3697,9 @@
                 <a:solidFill>
                   <a:srgbClr val="14161A"/>
                 </a:solidFill>
-                <a:latin typeface="Space Grotesk"/>
-                <a:ea typeface="Space Grotesk"/>
-                <a:cs typeface="Space Grotesk"/>
+                <a:latin typeface="HK Grotesk"/>
+                <a:ea typeface="HK Grotesk"/>
+                <a:cs typeface="HK Grotesk"/>
               </a:rPr>
               <a:t>Julian Reyes</a:t>
             </a:r>
@@ -3771,9 +3771,9 @@
                 <a:solidFill>
                   <a:srgbClr val="24272E"/>
                 </a:solidFill>
-                <a:latin typeface="Space Grotesk"/>
-                <a:ea typeface="Space Grotesk"/>
-                <a:cs typeface="Space Grotesk"/>
+                <a:latin typeface="HK Grotesk"/>
+                <a:ea typeface="HK Grotesk"/>
+                <a:cs typeface="HK Grotesk"/>
               </a:rPr>
               <a:t>I help buyers and sellers move with intention in Chicago’s condo market. Eight years in. Hundreds of doors opened. One quiet rule — represent every client the way I’d want my own family represented.</a:t>
             </a:r>
@@ -3841,9 +3841,9 @@
                 <a:solidFill>
                   <a:srgbClr val="14161A"/>
                 </a:solidFill>
-                <a:latin typeface="Space Grotesk"/>
-                <a:ea typeface="Space Grotesk"/>
-                <a:cs typeface="Space Grotesk"/>
+                <a:latin typeface="HK Grotesk"/>
+                <a:ea typeface="HK Grotesk"/>
+                <a:cs typeface="HK Grotesk"/>
               </a:rPr>
               <a:t>312 · 555 · 0148</a:t>
             </a:r>
@@ -3911,9 +3911,9 @@
                 <a:solidFill>
                   <a:srgbClr val="14161A"/>
                 </a:solidFill>
-                <a:latin typeface="Space Grotesk"/>
-                <a:ea typeface="Space Grotesk"/>
-                <a:cs typeface="Space Grotesk"/>
+                <a:latin typeface="HK Grotesk"/>
+                <a:ea typeface="HK Grotesk"/>
+                <a:cs typeface="HK Grotesk"/>
               </a:rPr>
               <a:t>julian@northandoak.co</a:t>
             </a:r>
@@ -3981,9 +3981,9 @@
                 <a:solidFill>
                   <a:srgbClr val="14161A"/>
                 </a:solidFill>
-                <a:latin typeface="Space Grotesk"/>
-                <a:ea typeface="Space Grotesk"/>
-                <a:cs typeface="Space Grotesk"/>
+                <a:latin typeface="HK Grotesk"/>
+                <a:ea typeface="HK Grotesk"/>
+                <a:cs typeface="HK Grotesk"/>
               </a:rPr>
               <a:t>northandoak.co</a:t>
             </a:r>
